--- a/implemented-features.pptx
+++ b/implemented-features.pptx
@@ -3229,9 +3229,33 @@
           </a:p>
         </p:txBody>
       </p:sp>
-      <p:sp>
-        <p:nvSpPr>
-          <p:cNvPr id="5" name="TextBox 4"/>
+      <p:pic>
+        <p:nvPicPr>
+          <p:cNvPr id="5" name="Picture 4" descr="docusaurus.png"/>
+          <p:cNvPicPr>
+            <a:picLocks noChangeAspect="1"/>
+          </p:cNvPicPr>
+          <p:nvPr/>
+        </p:nvPicPr>
+        <p:blipFill>
+          <a:blip r:embed="rId2"/>
+          <a:stretch>
+            <a:fillRect/>
+          </a:stretch>
+        </p:blipFill>
+        <p:spPr>
+          <a:xfrm>
+            <a:off x="10058400" y="502920"/>
+            <a:ext cx="1005840" cy="1005840"/>
+          </a:xfrm>
+          <a:prstGeom prst="rect">
+            <a:avLst/>
+          </a:prstGeom>
+        </p:spPr>
+      </p:pic>
+      <p:sp>
+        <p:nvSpPr>
+          <p:cNvPr id="6" name="TextBox 5"/>
           <p:cNvSpPr txBox="1"/>
           <p:nvPr/>
         </p:nvSpPr>
@@ -3266,7 +3290,7 @@
       </p:sp>
       <p:sp>
         <p:nvSpPr>
-          <p:cNvPr id="6" name="TextBox 5"/>
+          <p:cNvPr id="7" name="TextBox 6"/>
           <p:cNvSpPr txBox="1"/>
           <p:nvPr/>
         </p:nvSpPr>
@@ -3301,7 +3325,7 @@
       </p:sp>
       <p:sp>
         <p:nvSpPr>
-          <p:cNvPr id="7" name="TextBox 6"/>
+          <p:cNvPr id="8" name="TextBox 7"/>
           <p:cNvSpPr txBox="1"/>
           <p:nvPr/>
         </p:nvSpPr>
@@ -3336,7 +3360,7 @@
       </p:sp>
       <p:sp>
         <p:nvSpPr>
-          <p:cNvPr id="8" name="TextBox 7"/>
+          <p:cNvPr id="9" name="TextBox 8"/>
           <p:cNvSpPr txBox="1"/>
           <p:nvPr/>
         </p:nvSpPr>

--- a/implemented-features.pptx
+++ b/implemented-features.pptx
@@ -3283,7 +3283,7 @@
                 </a:solidFill>
                 <a:latin typeface="Calibri"/>
               </a:rPr>
-              <a:t>TECHNICAL DOCUMENTATION PLATFORM</a:t>
+              <a:t>USER GUIDE</a:t>
             </a:r>
           </a:p>
         </p:txBody>
@@ -3312,13 +3312,13 @@
           <a:p>
             <a:pPr algn="l"/>
             <a:r>
-              <a:rPr sz="4400" b="1">
+              <a:rPr sz="4200" b="1">
                 <a:solidFill>
                   <a:srgbClr val="FFFFFF"/>
                 </a:solidFill>
                 <a:latin typeface="Calibri"/>
               </a:rPr>
-              <a:t>Docusaurus — Implemented Features</a:t>
+              <a:t>Docusaurus — User Guide</a:t>
             </a:r>
           </a:p>
         </p:txBody>
@@ -3353,7 +3353,7 @@
                 </a:solidFill>
                 <a:latin typeface="Calibri"/>
               </a:rPr>
-              <a:t>Modular documentation, architecture diagrams &amp; professional PDF export</a:t>
+              <a:t>Write, preview, illustrate and export your documentation</a:t>
             </a:r>
           </a:p>
         </p:txBody>
@@ -3508,16 +3508,40 @@
           </a:p>
         </p:txBody>
       </p:sp>
-      <p:sp>
-        <p:nvSpPr>
-          <p:cNvPr id="4" name="TextBox 3"/>
+      <p:pic>
+        <p:nvPicPr>
+          <p:cNvPr id="4" name="Picture 3" descr="docusaurus.png"/>
+          <p:cNvPicPr>
+            <a:picLocks noChangeAspect="1"/>
+          </p:cNvPicPr>
+          <p:nvPr/>
+        </p:nvPicPr>
+        <p:blipFill>
+          <a:blip r:embed="rId2"/>
+          <a:stretch>
+            <a:fillRect/>
+          </a:stretch>
+        </p:blipFill>
+        <p:spPr>
+          <a:xfrm>
+            <a:off x="10424160" y="457200"/>
+            <a:ext cx="822960" cy="822960"/>
+          </a:xfrm>
+          <a:prstGeom prst="rect">
+            <a:avLst/>
+          </a:prstGeom>
+        </p:spPr>
+      </p:pic>
+      <p:sp>
+        <p:nvSpPr>
+          <p:cNvPr id="5" name="TextBox 4"/>
           <p:cNvSpPr txBox="1"/>
           <p:nvPr/>
         </p:nvSpPr>
         <p:spPr>
           <a:xfrm>
             <a:off x="914400" y="640080"/>
-            <a:ext cx="10058400" cy="731520"/>
+            <a:ext cx="9144000" cy="731520"/>
           </a:xfrm>
           <a:prstGeom prst="rect">
             <a:avLst/>
@@ -3532,20 +3556,20 @@
           <a:p>
             <a:pPr algn="l"/>
             <a:r>
-              <a:rPr sz="3400" b="1">
+              <a:rPr sz="3200" b="1">
                 <a:solidFill>
                   <a:srgbClr val="FFFFFF"/>
                 </a:solidFill>
                 <a:latin typeface="Calibri"/>
               </a:rPr>
-              <a:t>In summary</a:t>
-            </a:r>
-          </a:p>
-        </p:txBody>
-      </p:sp>
-      <p:sp>
-        <p:nvSpPr>
-          <p:cNvPr id="5" name="Rectangle 4"/>
+              <a:t>Cheat sheet</a:t>
+            </a:r>
+          </a:p>
+        </p:txBody>
+      </p:sp>
+      <p:sp>
+        <p:nvSpPr>
+          <p:cNvPr id="6" name="Rectangle 5"/>
           <p:cNvSpPr/>
           <p:nvPr/>
         </p:nvSpPr>
@@ -3589,13 +3613,13 @@
       </p:sp>
       <p:sp>
         <p:nvSpPr>
-          <p:cNvPr id="6" name="TextBox 5"/>
+          <p:cNvPr id="7" name="TextBox 6"/>
           <p:cNvSpPr txBox="1"/>
           <p:nvPr/>
         </p:nvSpPr>
         <p:spPr>
           <a:xfrm>
-            <a:off x="1005840" y="1737360"/>
+            <a:off x="1005840" y="1783080"/>
             <a:ext cx="10241280" cy="640080"/>
           </a:xfrm>
           <a:prstGeom prst="rect">
@@ -3611,7 +3635,7 @@
           <a:p>
             <a:pPr algn="l"/>
             <a:r>
-              <a:rPr sz="1800" b="1">
+              <a:rPr sz="1700" b="1">
                 <a:solidFill>
                   <a:srgbClr val="FFCC00"/>
                 </a:solidFill>
@@ -3620,35 +3644,35 @@
               <a:t>✓  </a:t>
             </a:r>
             <a:r>
-              <a:rPr sz="1800" b="1">
+              <a:rPr sz="1700" b="1">
                 <a:solidFill>
                   <a:srgbClr val="FFFFFF"/>
                 </a:solidFill>
                 <a:latin typeface="Calibri"/>
               </a:rPr>
-              <a:t>Modular documentation  —  </a:t>
-            </a:r>
-            <a:r>
-              <a:rPr sz="1600" b="0">
+              <a:t>make dev  —  </a:t>
+            </a:r>
+            <a:r>
+              <a:rPr sz="1500" b="0">
                 <a:solidFill>
                   <a:srgbClr val="CCD6EE"/>
                 </a:solidFill>
                 <a:latin typeface="Calibri"/>
               </a:rPr>
-              <a:t>#include directive + hot reload of fragments</a:t>
-            </a:r>
-          </a:p>
-        </p:txBody>
-      </p:sp>
-      <p:sp>
-        <p:nvSpPr>
-          <p:cNvPr id="7" name="TextBox 6"/>
+              <a:t>start the local server (live preview)</a:t>
+            </a:r>
+          </a:p>
+        </p:txBody>
+      </p:sp>
+      <p:sp>
+        <p:nvSpPr>
+          <p:cNvPr id="8" name="TextBox 7"/>
           <p:cNvSpPr txBox="1"/>
           <p:nvPr/>
         </p:nvSpPr>
         <p:spPr>
           <a:xfrm>
-            <a:off x="1005840" y="2395728"/>
+            <a:off x="1005840" y="2404872"/>
             <a:ext cx="10241280" cy="640080"/>
           </a:xfrm>
           <a:prstGeom prst="rect">
@@ -3664,7 +3688,7 @@
           <a:p>
             <a:pPr algn="l"/>
             <a:r>
-              <a:rPr sz="1800" b="1">
+              <a:rPr sz="1700" b="1">
                 <a:solidFill>
                   <a:srgbClr val="FFCC00"/>
                 </a:solidFill>
@@ -3673,35 +3697,35 @@
               <a:t>✓  </a:t>
             </a:r>
             <a:r>
-              <a:rPr sz="1800" b="1">
+              <a:rPr sz="1700" b="1">
                 <a:solidFill>
                   <a:srgbClr val="FFFFFF"/>
                 </a:solidFill>
                 <a:latin typeface="Calibri"/>
               </a:rPr>
-              <a:t>Reuse  —  </a:t>
-            </a:r>
-            <a:r>
-              <a:rPr sz="1600" b="0">
+              <a:t>#include "file.md"  —  </a:t>
+            </a:r>
+            <a:r>
+              <a:rPr sz="1500" b="0">
                 <a:solidFill>
                   <a:srgbClr val="CCD6EE"/>
                 </a:solidFill>
                 <a:latin typeface="Calibri"/>
               </a:rPr>
-              <a:t>Partials &amp; global "Prerequisites" MDX component</a:t>
-            </a:r>
-          </a:p>
-        </p:txBody>
-      </p:sp>
-      <p:sp>
-        <p:nvSpPr>
-          <p:cNvPr id="8" name="TextBox 7"/>
+              <a:t>assemble reusable fragments</a:t>
+            </a:r>
+          </a:p>
+        </p:txBody>
+      </p:sp>
+      <p:sp>
+        <p:nvSpPr>
+          <p:cNvPr id="9" name="TextBox 8"/>
           <p:cNvSpPr txBox="1"/>
           <p:nvPr/>
         </p:nvSpPr>
         <p:spPr>
           <a:xfrm>
-            <a:off x="1005840" y="3054096"/>
+            <a:off x="1005840" y="3026664"/>
             <a:ext cx="10241280" cy="640080"/>
           </a:xfrm>
           <a:prstGeom prst="rect">
@@ -3717,7 +3741,7 @@
           <a:p>
             <a:pPr algn="l"/>
             <a:r>
-              <a:rPr sz="1800" b="1">
+              <a:rPr sz="1700" b="1">
                 <a:solidFill>
                   <a:srgbClr val="FFCC00"/>
                 </a:solidFill>
@@ -3726,35 +3750,35 @@
               <a:t>✓  </a:t>
             </a:r>
             <a:r>
-              <a:rPr sz="1800" b="1">
+              <a:rPr sz="1700" b="1">
                 <a:solidFill>
                   <a:srgbClr val="FFFFFF"/>
                 </a:solidFill>
                 <a:latin typeface="Calibri"/>
               </a:rPr>
-              <a:t>Architecture as code  —  </a:t>
-            </a:r>
-            <a:r>
-              <a:rPr sz="1600" b="0">
+              <a:t>"Prerequisites"  —  </a:t>
+            </a:r>
+            <a:r>
+              <a:rPr sz="1500" b="0">
                 <a:solidFill>
                   <a:srgbClr val="CCD6EE"/>
                 </a:solidFill>
                 <a:latin typeface="Calibri"/>
               </a:rPr>
-              <a:t>LikeC4 (C4) + tldraw, interactive diagrams</a:t>
-            </a:r>
-          </a:p>
-        </p:txBody>
-      </p:sp>
-      <p:sp>
-        <p:nvSpPr>
-          <p:cNvPr id="9" name="TextBox 8"/>
+              <a:t>reuse one block everywhere, single source</a:t>
+            </a:r>
+          </a:p>
+        </p:txBody>
+      </p:sp>
+      <p:sp>
+        <p:nvSpPr>
+          <p:cNvPr id="10" name="TextBox 9"/>
           <p:cNvSpPr txBox="1"/>
           <p:nvPr/>
         </p:nvSpPr>
         <p:spPr>
           <a:xfrm>
-            <a:off x="1005840" y="3712464"/>
+            <a:off x="1005840" y="3648456"/>
             <a:ext cx="10241280" cy="640080"/>
           </a:xfrm>
           <a:prstGeom prst="rect">
@@ -3770,7 +3794,7 @@
           <a:p>
             <a:pPr algn="l"/>
             <a:r>
-              <a:rPr sz="1800" b="1">
+              <a:rPr sz="1700" b="1">
                 <a:solidFill>
                   <a:srgbClr val="FFCC00"/>
                 </a:solidFill>
@@ -3779,35 +3803,35 @@
               <a:t>✓  </a:t>
             </a:r>
             <a:r>
-              <a:rPr sz="1800" b="1">
+              <a:rPr sz="1700" b="1">
                 <a:solidFill>
                   <a:srgbClr val="FFFFFF"/>
                 </a:solidFill>
                 <a:latin typeface="Calibri"/>
               </a:rPr>
-              <a:t>Professional PDF export  —  </a:t>
-            </a:r>
-            <a:r>
-              <a:rPr sz="1600" b="0">
+              <a:t>LikeC4 / tldraw  —  </a:t>
+            </a:r>
+            <a:r>
+              <a:rPr sz="1500" b="0">
                 <a:solidFill>
                   <a:srgbClr val="CCD6EE"/>
                 </a:solidFill>
                 <a:latin typeface="Calibri"/>
               </a:rPr>
-              <a:t>Containerized WeasyPrint, cover + TOC + bookmarks</a:t>
-            </a:r>
-          </a:p>
-        </p:txBody>
-      </p:sp>
-      <p:sp>
-        <p:nvSpPr>
-          <p:cNvPr id="10" name="TextBox 9"/>
+              <a:t>browse the architecture diagrams</a:t>
+            </a:r>
+          </a:p>
+        </p:txBody>
+      </p:sp>
+      <p:sp>
+        <p:nvSpPr>
+          <p:cNvPr id="11" name="TextBox 10"/>
           <p:cNvSpPr txBox="1"/>
           <p:nvPr/>
         </p:nvSpPr>
         <p:spPr>
           <a:xfrm>
-            <a:off x="1005840" y="4370832"/>
+            <a:off x="1005840" y="4270248"/>
             <a:ext cx="10241280" cy="640080"/>
           </a:xfrm>
           <a:prstGeom prst="rect">
@@ -3823,7 +3847,7 @@
           <a:p>
             <a:pPr algn="l"/>
             <a:r>
-              <a:rPr sz="1800" b="1">
+              <a:rPr sz="1700" b="1">
                 <a:solidFill>
                   <a:srgbClr val="FFCC00"/>
                 </a:solidFill>
@@ -3832,35 +3856,35 @@
               <a:t>✓  </a:t>
             </a:r>
             <a:r>
-              <a:rPr sz="1800" b="1">
+              <a:rPr sz="1700" b="1">
                 <a:solidFill>
                   <a:srgbClr val="FFFFFF"/>
                 </a:solidFill>
                 <a:latin typeface="Calibri"/>
               </a:rPr>
-              <a:t>Security  —  </a:t>
-            </a:r>
-            <a:r>
-              <a:rPr sz="1600" b="0">
+              <a:t>make pdf  —  </a:t>
+            </a:r>
+            <a:r>
+              <a:rPr sz="1500" b="0">
                 <a:solidFill>
                   <a:srgbClr val="CCD6EE"/>
                 </a:solidFill>
                 <a:latin typeface="Calibri"/>
               </a:rPr>
-              <a:t>Red Hat hardened image, multi-stage build, up-to-date deps</a:t>
-            </a:r>
-          </a:p>
-        </p:txBody>
-      </p:sp>
-      <p:sp>
-        <p:nvSpPr>
-          <p:cNvPr id="11" name="TextBox 10"/>
+              <a:t>export the whole docs as one branded PDF</a:t>
+            </a:r>
+          </a:p>
+        </p:txBody>
+      </p:sp>
+      <p:sp>
+        <p:nvSpPr>
+          <p:cNvPr id="12" name="TextBox 11"/>
           <p:cNvSpPr txBox="1"/>
           <p:nvPr/>
         </p:nvSpPr>
         <p:spPr>
           <a:xfrm>
-            <a:off x="1005840" y="5029200"/>
+            <a:off x="1005840" y="4892040"/>
             <a:ext cx="10241280" cy="640080"/>
           </a:xfrm>
           <a:prstGeom prst="rect">
@@ -3876,7 +3900,7 @@
           <a:p>
             <a:pPr algn="l"/>
             <a:r>
-              <a:rPr sz="1800" b="1">
+              <a:rPr sz="1700" b="1">
                 <a:solidFill>
                   <a:srgbClr val="FFCC00"/>
                 </a:solidFill>
@@ -3885,35 +3909,35 @@
               <a:t>✓  </a:t>
             </a:r>
             <a:r>
-              <a:rPr sz="1800" b="1">
+              <a:rPr sz="1700" b="1">
                 <a:solidFill>
                   <a:srgbClr val="FFFFFF"/>
                 </a:solidFill>
                 <a:latin typeface="Calibri"/>
               </a:rPr>
-              <a:t>CI/CD  —  </a:t>
-            </a:r>
-            <a:r>
-              <a:rPr sz="1600" b="0">
+              <a:t>git push  —  </a:t>
+            </a:r>
+            <a:r>
+              <a:rPr sz="1500" b="0">
                 <a:solidFill>
                   <a:srgbClr val="CCD6EE"/>
                 </a:solidFill>
                 <a:latin typeface="Calibri"/>
               </a:rPr>
-              <a:t>GitHub Pages, PDF artifacts, release PDF as a PR</a:t>
-            </a:r>
-          </a:p>
-        </p:txBody>
-      </p:sp>
-      <p:sp>
-        <p:nvSpPr>
-          <p:cNvPr id="12" name="TextBox 11"/>
+              <a:t>site + PDF published automatically (CI/CD)</a:t>
+            </a:r>
+          </a:p>
+        </p:txBody>
+      </p:sp>
+      <p:sp>
+        <p:nvSpPr>
+          <p:cNvPr id="13" name="TextBox 12"/>
           <p:cNvSpPr txBox="1"/>
           <p:nvPr/>
         </p:nvSpPr>
         <p:spPr>
           <a:xfrm>
-            <a:off x="914400" y="6126480"/>
+            <a:off x="914400" y="6217920"/>
             <a:ext cx="10058400" cy="457200"/>
           </a:xfrm>
           <a:prstGeom prst="rect">
@@ -3935,7 +3959,7 @@
                 </a:solidFill>
                 <a:latin typeface="Calibri"/>
               </a:rPr>
-              <a:t>Thank you!  —  InnovateIt-ak / docusaurus</a:t>
+              <a:t>Happy writing!  —  InnovateIt-ak / docusaurus</a:t>
             </a:r>
           </a:p>
         </p:txBody>
@@ -4061,13 +4085,13 @@
           <a:p>
             <a:pPr algn="l"/>
             <a:r>
-              <a:rPr sz="3000" b="1">
+              <a:rPr sz="2800" b="1">
                 <a:solidFill>
                   <a:srgbClr val="003399"/>
                 </a:solidFill>
                 <a:latin typeface="Calibri"/>
               </a:rPr>
-              <a:t>Overview</a:t>
+              <a:t>What you can do</a:t>
             </a:r>
           </a:p>
         </p:txBody>
@@ -4080,7 +4104,7 @@
         </p:nvSpPr>
         <p:spPr>
           <a:xfrm>
-            <a:off x="658368" y="1554480"/>
+            <a:off x="658368" y="1481328"/>
             <a:ext cx="2011680" cy="38100"/>
           </a:xfrm>
           <a:prstGeom prst="rect">
@@ -4124,8 +4148,8 @@
         </p:nvSpPr>
         <p:spPr>
           <a:xfrm>
-            <a:off x="658368" y="1920240"/>
-            <a:ext cx="10881360" cy="4297680"/>
+            <a:off x="658368" y="1828800"/>
+            <a:ext cx="10881360" cy="4389120"/>
           </a:xfrm>
           <a:prstGeom prst="rect">
             <a:avLst/>
@@ -4140,14 +4164,14 @@
           <a:p>
             <a:pPr>
               <a:lnSpc>
-                <a:spcPct val="105000"/>
+                <a:spcPct val="104000"/>
               </a:lnSpc>
               <a:spcAft>
-                <a:spcPts val="1000"/>
+                <a:spcPts val="900"/>
               </a:spcAft>
             </a:pPr>
             <a:r>
-              <a:rPr sz="1700" b="1">
+              <a:rPr sz="1600" b="1">
                 <a:solidFill>
                   <a:srgbClr val="FFCC00"/>
                 </a:solidFill>
@@ -4155,33 +4179,33 @@
               <a:t>•  </a:t>
             </a:r>
             <a:r>
-              <a:rPr sz="1700" b="1">
+              <a:rPr sz="1600" b="1">
                 <a:solidFill>
                   <a:srgbClr val="003399"/>
                 </a:solidFill>
               </a:rPr>
-              <a:t>Goal — </a:t>
-            </a:r>
-            <a:r>
-              <a:rPr sz="1700">
+              <a:t>Write — </a:t>
+            </a:r>
+            <a:r>
+              <a:rPr sz="1600">
                 <a:solidFill>
                   <a:srgbClr val="1A1A2E"/>
                 </a:solidFill>
               </a:rPr>
-              <a:t>turn Docusaurus into a technical architecture documentation platform — versioned and exportable.</a:t>
+              <a:t>author your docs in Markdown / MDX, as usual.</a:t>
             </a:r>
           </a:p>
           <a:p>
             <a:pPr>
               <a:lnSpc>
-                <a:spcPct val="105000"/>
+                <a:spcPct val="104000"/>
               </a:lnSpc>
               <a:spcAft>
-                <a:spcPts val="1000"/>
+                <a:spcPts val="900"/>
               </a:spcAft>
             </a:pPr>
             <a:r>
-              <a:rPr sz="1700" b="1">
+              <a:rPr sz="1600" b="1">
                 <a:solidFill>
                   <a:srgbClr val="FFCC00"/>
                 </a:solidFill>
@@ -4189,33 +4213,33 @@
               <a:t>•  </a:t>
             </a:r>
             <a:r>
-              <a:rPr sz="1700" b="1">
+              <a:rPr sz="1600" b="1">
                 <a:solidFill>
                   <a:srgbClr val="003399"/>
                 </a:solidFill>
               </a:rPr>
-              <a:t>Modular documentation — </a:t>
-            </a:r>
-            <a:r>
-              <a:rPr sz="1700">
+              <a:t>Assemble — </a:t>
+            </a:r>
+            <a:r>
+              <a:rPr sz="1600">
                 <a:solidFill>
                   <a:srgbClr val="1A1A2E"/>
                 </a:solidFill>
               </a:rPr>
-              <a:t>#include directive to assemble reusable Markdown fragments.</a:t>
+              <a:t>reuse fragments with the #include directive — no import needed.</a:t>
             </a:r>
           </a:p>
           <a:p>
             <a:pPr>
               <a:lnSpc>
-                <a:spcPct val="105000"/>
+                <a:spcPct val="104000"/>
               </a:lnSpc>
               <a:spcAft>
-                <a:spcPts val="1000"/>
+                <a:spcPts val="900"/>
               </a:spcAft>
             </a:pPr>
             <a:r>
-              <a:rPr sz="1700" b="1">
+              <a:rPr sz="1600" b="1">
                 <a:solidFill>
                   <a:srgbClr val="FFCC00"/>
                 </a:solidFill>
@@ -4223,33 +4247,33 @@
               <a:t>•  </a:t>
             </a:r>
             <a:r>
-              <a:rPr sz="1700" b="1">
+              <a:rPr sz="1600" b="1">
                 <a:solidFill>
                   <a:srgbClr val="003399"/>
                 </a:solidFill>
               </a:rPr>
-              <a:t>Living diagrams — </a:t>
-            </a:r>
-            <a:r>
-              <a:rPr sz="1700">
+              <a:t>Illustrate — </a:t>
+            </a:r>
+            <a:r>
+              <a:rPr sz="1600">
                 <a:solidFill>
                   <a:srgbClr val="1A1A2E"/>
                 </a:solidFill>
               </a:rPr>
-              <a:t>LikeC4 integration (architecture as code) and tldraw for interactive diagrams.</a:t>
+              <a:t>embed architecture diagrams (LikeC4) and sketches (tldraw).</a:t>
             </a:r>
           </a:p>
           <a:p>
             <a:pPr>
               <a:lnSpc>
-                <a:spcPct val="105000"/>
+                <a:spcPct val="104000"/>
               </a:lnSpc>
               <a:spcAft>
-                <a:spcPts val="1000"/>
+                <a:spcPts val="900"/>
               </a:spcAft>
             </a:pPr>
             <a:r>
-              <a:rPr sz="1700" b="1">
+              <a:rPr sz="1600" b="1">
                 <a:solidFill>
                   <a:srgbClr val="FFCC00"/>
                 </a:solidFill>
@@ -4257,33 +4281,33 @@
               <a:t>•  </a:t>
             </a:r>
             <a:r>
-              <a:rPr sz="1700" b="1">
+              <a:rPr sz="1600" b="1">
                 <a:solidFill>
                   <a:srgbClr val="003399"/>
                 </a:solidFill>
               </a:rPr>
-              <a:t>Professional PDF export — </a:t>
-            </a:r>
-            <a:r>
-              <a:rPr sz="1700">
+              <a:t>Preview — </a:t>
+            </a:r>
+            <a:r>
+              <a:rPr sz="1600">
                 <a:solidFill>
                   <a:srgbClr val="1A1A2E"/>
                 </a:solidFill>
               </a:rPr>
-              <a:t>single, paginated and branded PDF generated via containerized WeasyPrint.</a:t>
+              <a:t>live preview: any edit (even an included fragment) refreshes instantly.</a:t>
             </a:r>
           </a:p>
           <a:p>
             <a:pPr>
               <a:lnSpc>
-                <a:spcPct val="105000"/>
+                <a:spcPct val="104000"/>
               </a:lnSpc>
               <a:spcAft>
-                <a:spcPts val="1000"/>
+                <a:spcPts val="900"/>
               </a:spcAft>
             </a:pPr>
             <a:r>
-              <a:rPr sz="1700" b="1">
+              <a:rPr sz="1600" b="1">
                 <a:solidFill>
                   <a:srgbClr val="FFCC00"/>
                 </a:solidFill>
@@ -4291,20 +4315,20 @@
               <a:t>•  </a:t>
             </a:r>
             <a:r>
-              <a:rPr sz="1700" b="1">
+              <a:rPr sz="1600" b="1">
                 <a:solidFill>
                   <a:srgbClr val="003399"/>
                 </a:solidFill>
               </a:rPr>
-              <a:t>Industrialization — </a:t>
-            </a:r>
-            <a:r>
-              <a:rPr sz="1700">
+              <a:t>Export — </a:t>
+            </a:r>
+            <a:r>
+              <a:rPr sz="1600">
                 <a:solidFill>
                   <a:srgbClr val="1A1A2E"/>
                 </a:solidFill>
               </a:rPr>
-              <a:t>Docker / docker-compose, Makefile and GitHub Actions CI/CD (Pages + PDF artifacts).</a:t>
+              <a:t>generate one branded PDF and publish the site in a single command.</a:t>
             </a:r>
           </a:p>
         </p:txBody>
@@ -4317,7 +4341,7 @@
         </p:nvSpPr>
         <p:spPr>
           <a:xfrm>
-            <a:off x="640080" y="6400800"/>
+            <a:off x="640080" y="6419088"/>
             <a:ext cx="9144000" cy="320040"/>
           </a:xfrm>
           <a:prstGeom prst="rect">
@@ -4339,7 +4363,7 @@
                 </a:solidFill>
                 <a:latin typeface="Calibri"/>
               </a:rPr>
-              <a:t>Docusaurus documentation platform — implemented features</a:t>
+              <a:t>Docusaurus — user guide</a:t>
             </a:r>
           </a:p>
         </p:txBody>
@@ -4352,7 +4376,7 @@
         </p:nvSpPr>
         <p:spPr>
           <a:xfrm>
-            <a:off x="11247120" y="6400800"/>
+            <a:off x="11247120" y="6419088"/>
             <a:ext cx="731520" cy="320040"/>
           </a:xfrm>
           <a:prstGeom prst="rect">
@@ -4471,7 +4495,7 @@
                 </a:solidFill>
                 <a:latin typeface="Calibri"/>
               </a:rPr>
-              <a:t>FEATURE 1 — MODULAR DOCUMENTATION</a:t>
+              <a:t>WRITE — MODULAR DOCUMENTATION</a:t>
             </a:r>
           </a:p>
         </p:txBody>
@@ -4500,13 +4524,13 @@
           <a:p>
             <a:pPr algn="l"/>
             <a:r>
-              <a:rPr sz="3000" b="1">
+              <a:rPr sz="2800" b="1">
                 <a:solidFill>
                   <a:srgbClr val="003399"/>
                 </a:solidFill>
                 <a:latin typeface="Calibri"/>
               </a:rPr>
-              <a:t>#include directive</a:t>
+              <a:t>Assemble with #include</a:t>
             </a:r>
           </a:p>
         </p:txBody>
@@ -4519,7 +4543,7 @@
         </p:nvSpPr>
         <p:spPr>
           <a:xfrm>
-            <a:off x="658368" y="1554480"/>
+            <a:off x="658368" y="1481328"/>
             <a:ext cx="2011680" cy="38100"/>
           </a:xfrm>
           <a:prstGeom prst="rect">
@@ -4563,8 +4587,8 @@
         </p:nvSpPr>
         <p:spPr>
           <a:xfrm>
-            <a:off x="658368" y="1920240"/>
-            <a:ext cx="10881360" cy="4297680"/>
+            <a:off x="658368" y="1828800"/>
+            <a:ext cx="5029200" cy="4389120"/>
           </a:xfrm>
           <a:prstGeom prst="rect">
             <a:avLst/>
@@ -4579,14 +4603,14 @@
           <a:p>
             <a:pPr>
               <a:lnSpc>
-                <a:spcPct val="105000"/>
+                <a:spcPct val="104000"/>
               </a:lnSpc>
               <a:spcAft>
-                <a:spcPts val="1000"/>
+                <a:spcPts val="900"/>
               </a:spcAft>
             </a:pPr>
             <a:r>
-              <a:rPr sz="1700" b="1">
+              <a:rPr sz="1600" b="1">
                 <a:solidFill>
                   <a:srgbClr val="FFCC00"/>
                 </a:solidFill>
@@ -4594,103 +4618,111 @@
               <a:t>•  </a:t>
             </a:r>
             <a:r>
-              <a:rPr sz="1700">
+              <a:rPr sz="1600" b="1">
+                <a:solidFill>
+                  <a:srgbClr val="003399"/>
+                </a:solidFill>
+              </a:rPr>
+              <a:t>Goal — </a:t>
+            </a:r>
+            <a:r>
+              <a:rPr sz="1600">
                 <a:solidFill>
                   <a:srgbClr val="1A1A2E"/>
                 </a:solidFill>
               </a:rPr>
-              <a:t>Custom remark plugin: assembles several Markdown files into a single page.</a:t>
+              <a:t>compose one page from several files.</a:t>
             </a:r>
           </a:p>
           <a:p>
             <a:pPr>
               <a:lnSpc>
-                <a:spcPct val="105000"/>
+                <a:spcPct val="104000"/>
               </a:lnSpc>
               <a:spcAft>
-                <a:spcPts val="1000"/>
+                <a:spcPts val="900"/>
               </a:spcAft>
             </a:pPr>
             <a:r>
-              <a:rPr sz="1500" b="1">
-                <a:solidFill>
-                  <a:srgbClr val="1B4FA0"/>
-                </a:solidFill>
-              </a:rPr>
-              <a:t>    –  </a:t>
-            </a:r>
-            <a:r>
-              <a:rPr sz="1500">
-                <a:solidFill>
-                  <a:srgbClr val="4A4A4A"/>
-                </a:solidFill>
-              </a:rPr>
-              <a:t>simple syntax: #include "path/to/fragment.md" on its own line.</a:t>
+              <a:rPr sz="1600" b="1">
+                <a:solidFill>
+                  <a:srgbClr val="FFCC00"/>
+                </a:solidFill>
+              </a:rPr>
+              <a:t>•  </a:t>
+            </a:r>
+            <a:r>
+              <a:rPr sz="1600">
+                <a:solidFill>
+                  <a:srgbClr val="1A1A2E"/>
+                </a:solidFill>
+              </a:rPr>
+              <a:t>write #include "path/file.md" on its own line.</a:t>
             </a:r>
           </a:p>
           <a:p>
             <a:pPr>
               <a:lnSpc>
-                <a:spcPct val="105000"/>
+                <a:spcPct val="104000"/>
               </a:lnSpc>
               <a:spcAft>
-                <a:spcPts val="1000"/>
+                <a:spcPts val="900"/>
               </a:spcAft>
             </a:pPr>
             <a:r>
-              <a:rPr sz="1500" b="1">
+              <a:rPr sz="1400" b="1">
                 <a:solidFill>
                   <a:srgbClr val="1B4FA0"/>
                 </a:solidFill>
               </a:rPr>
-              <a:t>    –  </a:t>
-            </a:r>
-            <a:r>
-              <a:rPr sz="1500">
+              <a:t>   –  </a:t>
+            </a:r>
+            <a:r>
+              <a:rPr sz="1400">
                 <a:solidFill>
                   <a:srgbClr val="4A4A4A"/>
                 </a:solidFill>
               </a:rPr>
-              <a:t>no import / declaration: content is inserted at the directive's location.</a:t>
+              <a:t>no import: content is inserted right there.</a:t>
             </a:r>
           </a:p>
           <a:p>
             <a:pPr>
               <a:lnSpc>
-                <a:spcPct val="105000"/>
+                <a:spcPct val="104000"/>
               </a:lnSpc>
               <a:spcAft>
-                <a:spcPts val="1000"/>
+                <a:spcPts val="900"/>
               </a:spcAft>
             </a:pPr>
             <a:r>
-              <a:rPr sz="1500" b="1">
+              <a:rPr sz="1400" b="1">
                 <a:solidFill>
                   <a:srgbClr val="1B4FA0"/>
                 </a:solidFill>
               </a:rPr>
-              <a:t>    –  </a:t>
-            </a:r>
-            <a:r>
-              <a:rPr sz="1500">
+              <a:t>   –  </a:t>
+            </a:r>
+            <a:r>
+              <a:rPr sz="1400">
                 <a:solidFill>
                   <a:srgbClr val="4A4A4A"/>
                 </a:solidFill>
               </a:rPr>
-              <a:t>path resolved relative to the calling file; front matter stripped automatically.</a:t>
+              <a:t>path relative to the file; front matter stripped.</a:t>
             </a:r>
           </a:p>
           <a:p>
             <a:pPr>
               <a:lnSpc>
-                <a:spcPct val="105000"/>
+                <a:spcPct val="104000"/>
               </a:lnSpc>
               <a:spcAft>
-                <a:spcPts val="1000"/>
+                <a:spcPts val="900"/>
               </a:spcAft>
             </a:pPr>
             <a:r>
-              <a:rPr sz="1700" b="1">
+              <a:rPr sz="1600" b="1">
                 <a:solidFill>
                   <a:srgbClr val="FFCC00"/>
                 </a:solidFill>
@@ -4698,93 +4730,57 @@
               <a:t>•  </a:t>
             </a:r>
             <a:r>
-              <a:rPr sz="1700" b="1">
+              <a:rPr sz="1600" b="1">
                 <a:solidFill>
                   <a:srgbClr val="003399"/>
                 </a:solidFill>
               </a:rPr>
-              <a:t>Nested includes — </a:t>
-            </a:r>
-            <a:r>
-              <a:rPr sz="1700">
+              <a:t>Tip — </a:t>
+            </a:r>
+            <a:r>
+              <a:rPr sz="1600">
                 <a:solidFill>
                   <a:srgbClr val="1A1A2E"/>
                 </a:solidFill>
               </a:rPr>
-              <a:t>a fragment can itself include other fragments.</a:t>
-            </a:r>
-          </a:p>
-          <a:p>
-            <a:pPr>
-              <a:lnSpc>
-                <a:spcPct val="105000"/>
-              </a:lnSpc>
-              <a:spcAft>
-                <a:spcPts val="1000"/>
-              </a:spcAft>
-            </a:pPr>
-            <a:r>
-              <a:rPr sz="1500" b="1">
-                <a:solidFill>
-                  <a:srgbClr val="1B4FA0"/>
-                </a:solidFill>
-              </a:rPr>
-              <a:t>    –  </a:t>
-            </a:r>
-            <a:r>
-              <a:rPr sz="1500">
-                <a:solidFill>
-                  <a:srgbClr val="4A4A4A"/>
-                </a:solidFill>
-              </a:rPr>
-              <a:t>circular-inclusion detection with an explicit error.</a:t>
-            </a:r>
-          </a:p>
-          <a:p>
-            <a:pPr>
-              <a:lnSpc>
-                <a:spcPct val="105000"/>
-              </a:lnSpc>
-              <a:spcAft>
-                <a:spcPts val="1000"/>
-              </a:spcAft>
-            </a:pPr>
-            <a:r>
-              <a:rPr sz="1700" b="1">
-                <a:solidFill>
-                  <a:srgbClr val="FFCC00"/>
-                </a:solidFill>
-              </a:rPr>
-              <a:t>•  </a:t>
-            </a:r>
-            <a:r>
-              <a:rPr sz="1700" b="1">
-                <a:solidFill>
-                  <a:srgbClr val="003399"/>
-                </a:solidFill>
-              </a:rPr>
-              <a:t>Robustness — </a:t>
-            </a:r>
-            <a:r>
-              <a:rPr sz="1700">
-                <a:solidFill>
-                  <a:srgbClr val="1A1A2E"/>
-                </a:solidFill>
-              </a:rPr>
-              <a:t>detection on the raw source text → no Markdown pitfalls (e.g. _ in file names).</a:t>
-            </a:r>
-          </a:p>
-        </p:txBody>
-      </p:sp>
-      <p:sp>
-        <p:nvSpPr>
-          <p:cNvPr id="7" name="TextBox 6"/>
+              <a:t>an _fragments/ folder (underscore) stays out of the sidebar.</a:t>
+            </a:r>
+          </a:p>
+        </p:txBody>
+      </p:sp>
+      <p:pic>
+        <p:nvPicPr>
+          <p:cNvPr id="7" name="Picture 6" descr="01-include-usage.png"/>
+          <p:cNvPicPr>
+            <a:picLocks noChangeAspect="1"/>
+          </p:cNvPicPr>
+          <p:nvPr/>
+        </p:nvPicPr>
+        <p:blipFill>
+          <a:blip r:embed="rId2"/>
+          <a:stretch>
+            <a:fillRect/>
+          </a:stretch>
+        </p:blipFill>
+        <p:spPr>
+          <a:xfrm>
+            <a:off x="5806440" y="2302956"/>
+            <a:ext cx="6035040" cy="3166486"/>
+          </a:xfrm>
+          <a:prstGeom prst="rect">
+            <a:avLst/>
+          </a:prstGeom>
+        </p:spPr>
+      </p:pic>
+      <p:sp>
+        <p:nvSpPr>
+          <p:cNvPr id="8" name="TextBox 7"/>
           <p:cNvSpPr txBox="1"/>
           <p:nvPr/>
         </p:nvSpPr>
         <p:spPr>
           <a:xfrm>
-            <a:off x="640080" y="6400800"/>
+            <a:off x="640080" y="6419088"/>
             <a:ext cx="9144000" cy="320040"/>
           </a:xfrm>
           <a:prstGeom prst="rect">
@@ -4806,20 +4802,20 @@
                 </a:solidFill>
                 <a:latin typeface="Calibri"/>
               </a:rPr>
-              <a:t>Docusaurus documentation platform — implemented features</a:t>
-            </a:r>
-          </a:p>
-        </p:txBody>
-      </p:sp>
-      <p:sp>
-        <p:nvSpPr>
-          <p:cNvPr id="8" name="TextBox 7"/>
+              <a:t>Docusaurus — user guide</a:t>
+            </a:r>
+          </a:p>
+        </p:txBody>
+      </p:sp>
+      <p:sp>
+        <p:nvSpPr>
+          <p:cNvPr id="9" name="TextBox 8"/>
           <p:cNvSpPr txBox="1"/>
           <p:nvPr/>
         </p:nvSpPr>
         <p:spPr>
           <a:xfrm>
-            <a:off x="11247120" y="6400800"/>
+            <a:off x="11247120" y="6419088"/>
             <a:ext cx="731520" cy="320040"/>
           </a:xfrm>
           <a:prstGeom prst="rect">
@@ -4938,7 +4934,7 @@
                 </a:solidFill>
                 <a:latin typeface="Calibri"/>
               </a:rPr>
-              <a:t>FEATURE 2 — DEVELOPER EXPERIENCE</a:t>
+              <a:t>PREVIEW — WORKFLOW</a:t>
             </a:r>
           </a:p>
         </p:txBody>
@@ -4967,13 +4963,13 @@
           <a:p>
             <a:pPr algn="l"/>
             <a:r>
-              <a:rPr sz="3000" b="1">
+              <a:rPr sz="2800" b="1">
                 <a:solidFill>
                   <a:srgbClr val="003399"/>
                 </a:solidFill>
                 <a:latin typeface="Calibri"/>
               </a:rPr>
-              <a:t>Live-reload of fragments</a:t>
+              <a:t>Run and preview the site</a:t>
             </a:r>
           </a:p>
         </p:txBody>
@@ -4986,7 +4982,7 @@
         </p:nvSpPr>
         <p:spPr>
           <a:xfrm>
-            <a:off x="658368" y="1554480"/>
+            <a:off x="658368" y="1481328"/>
             <a:ext cx="2011680" cy="38100"/>
           </a:xfrm>
           <a:prstGeom prst="rect">
@@ -5030,8 +5026,8 @@
         </p:nvSpPr>
         <p:spPr>
           <a:xfrm>
-            <a:off x="658368" y="1920240"/>
-            <a:ext cx="10881360" cy="4297680"/>
+            <a:off x="658368" y="1828800"/>
+            <a:ext cx="10881360" cy="4389120"/>
           </a:xfrm>
           <a:prstGeom prst="rect">
             <a:avLst/>
@@ -5046,14 +5042,14 @@
           <a:p>
             <a:pPr>
               <a:lnSpc>
-                <a:spcPct val="105000"/>
+                <a:spcPct val="104000"/>
               </a:lnSpc>
               <a:spcAft>
-                <a:spcPts val="1000"/>
+                <a:spcPts val="900"/>
               </a:spcAft>
             </a:pPr>
             <a:r>
-              <a:rPr sz="1700" b="1">
+              <a:rPr sz="1600" b="1">
                 <a:solidFill>
                   <a:srgbClr val="FFCC00"/>
                 </a:solidFill>
@@ -5061,33 +5057,33 @@
               <a:t>•  </a:t>
             </a:r>
             <a:r>
-              <a:rPr sz="1700" b="1">
+              <a:rPr sz="1600" b="1">
                 <a:solidFill>
                   <a:srgbClr val="003399"/>
                 </a:solidFill>
               </a:rPr>
-              <a:t>Problem — </a:t>
-            </a:r>
-            <a:r>
-              <a:rPr sz="1700">
+              <a:t>make dev — </a:t>
+            </a:r>
+            <a:r>
+              <a:rPr sz="1600">
                 <a:solidFill>
                   <a:srgbClr val="1A1A2E"/>
                 </a:solidFill>
               </a:rPr>
-              <a:t>the remark plugin reads fragments via fs; webpack is unaware of this dependency and won't recompile the page when a fragment changes.</a:t>
+              <a:t>starts the local server with live preview.</a:t>
             </a:r>
           </a:p>
           <a:p>
             <a:pPr>
               <a:lnSpc>
-                <a:spcPct val="105000"/>
+                <a:spcPct val="104000"/>
               </a:lnSpc>
               <a:spcAft>
-                <a:spcPts val="1000"/>
+                <a:spcPts val="900"/>
               </a:spcAft>
             </a:pPr>
             <a:r>
-              <a:rPr sz="1700" b="1">
+              <a:rPr sz="1600" b="1">
                 <a:solidFill>
                   <a:srgbClr val="FFCC00"/>
                 </a:solidFill>
@@ -5095,85 +5091,67 @@
               <a:t>•  </a:t>
             </a:r>
             <a:r>
-              <a:rPr sz="1700" b="1">
+              <a:rPr sz="1600" b="1">
                 <a:solidFill>
                   <a:srgbClr val="003399"/>
                 </a:solidFill>
               </a:rPr>
-              <a:t>Solution — </a:t>
-            </a:r>
-            <a:r>
-              <a:rPr sz="1700">
+              <a:t>Hot reload — </a:t>
+            </a:r>
+            <a:r>
+              <a:rPr sz="1600">
                 <a:solidFill>
                   <a:srgbClr val="1A1A2E"/>
                 </a:solidFill>
               </a:rPr>
-              <a:t>a webpack pre-loader registers each included file as a dependency of the page.</a:t>
+              <a:t>edit a page or an included fragment → the preview updates itself.</a:t>
             </a:r>
           </a:p>
           <a:p>
             <a:pPr>
               <a:lnSpc>
-                <a:spcPct val="105000"/>
+                <a:spcPct val="104000"/>
               </a:lnSpc>
               <a:spcAft>
-                <a:spcPts val="1000"/>
+                <a:spcPts val="900"/>
               </a:spcAft>
             </a:pPr>
             <a:r>
-              <a:rPr sz="1500" b="1">
-                <a:solidFill>
-                  <a:srgbClr val="1B4FA0"/>
-                </a:solidFill>
-              </a:rPr>
-              <a:t>    –  </a:t>
-            </a:r>
-            <a:r>
-              <a:rPr sz="1500">
-                <a:solidFill>
-                  <a:srgbClr val="4A4A4A"/>
-                </a:solidFill>
-              </a:rPr>
-              <a:t>recursive this.addDependency() call for every #include (and their nesting).</a:t>
+              <a:rPr sz="1600" b="1">
+                <a:solidFill>
+                  <a:srgbClr val="FFCC00"/>
+                </a:solidFill>
+              </a:rPr>
+              <a:t>•  </a:t>
+            </a:r>
+            <a:r>
+              <a:rPr sz="1600" b="1">
+                <a:solidFill>
+                  <a:srgbClr val="003399"/>
+                </a:solidFill>
+              </a:rPr>
+              <a:t>make prod — </a:t>
+            </a:r>
+            <a:r>
+              <a:rPr sz="1600">
+                <a:solidFill>
+                  <a:srgbClr val="1A1A2E"/>
+                </a:solidFill>
+              </a:rPr>
+              <a:t>production build served behind Caddy.</a:t>
             </a:r>
           </a:p>
           <a:p>
             <a:pPr>
               <a:lnSpc>
-                <a:spcPct val="105000"/>
+                <a:spcPct val="104000"/>
               </a:lnSpc>
               <a:spcAft>
-                <a:spcPts val="1000"/>
+                <a:spcPts val="900"/>
               </a:spcAft>
             </a:pPr>
             <a:r>
-              <a:rPr sz="1500" b="1">
-                <a:solidFill>
-                  <a:srgbClr val="1B4FA0"/>
-                </a:solidFill>
-              </a:rPr>
-              <a:t>    –  </a:t>
-            </a:r>
-            <a:r>
-              <a:rPr sz="1500">
-                <a:solidFill>
-                  <a:srgbClr val="4A4A4A"/>
-                </a:solidFill>
-              </a:rPr>
-              <a:t>source left unchanged: the loader only registers dependencies.</a:t>
-            </a:r>
-          </a:p>
-          <a:p>
-            <a:pPr>
-              <a:lnSpc>
-                <a:spcPct val="105000"/>
-              </a:lnSpc>
-              <a:spcAft>
-                <a:spcPts val="1000"/>
-              </a:spcAft>
-            </a:pPr>
-            <a:r>
-              <a:rPr sz="1700" b="1">
+              <a:rPr sz="1600" b="1">
                 <a:solidFill>
                   <a:srgbClr val="FFCC00"/>
                 </a:solidFill>
@@ -5181,20 +5159,20 @@
               <a:t>•  </a:t>
             </a:r>
             <a:r>
-              <a:rPr sz="1700" b="1">
+              <a:rPr sz="1600" b="1">
                 <a:solidFill>
                   <a:srgbClr val="003399"/>
                 </a:solidFill>
               </a:rPr>
-              <a:t>Result — </a:t>
-            </a:r>
-            <a:r>
-              <a:rPr sz="1700">
+              <a:t>No toolchain to install — </a:t>
+            </a:r>
+            <a:r>
+              <a:rPr sz="1600">
                 <a:solidFill>
                   <a:srgbClr val="1A1A2E"/>
                 </a:solidFill>
               </a:rPr>
-              <a:t>hot reload works — editing a fragment instantly refreshes every page that includes it.</a:t>
+              <a:t>everything runs via Docker / docker-compose.</a:t>
             </a:r>
           </a:p>
         </p:txBody>
@@ -5207,7 +5185,7 @@
         </p:nvSpPr>
         <p:spPr>
           <a:xfrm>
-            <a:off x="640080" y="6400800"/>
+            <a:off x="640080" y="6419088"/>
             <a:ext cx="9144000" cy="320040"/>
           </a:xfrm>
           <a:prstGeom prst="rect">
@@ -5229,7 +5207,7 @@
                 </a:solidFill>
                 <a:latin typeface="Calibri"/>
               </a:rPr>
-              <a:t>Docusaurus documentation platform — implemented features</a:t>
+              <a:t>Docusaurus — user guide</a:t>
             </a:r>
           </a:p>
         </p:txBody>
@@ -5242,7 +5220,7 @@
         </p:nvSpPr>
         <p:spPr>
           <a:xfrm>
-            <a:off x="11247120" y="6400800"/>
+            <a:off x="11247120" y="6419088"/>
             <a:ext cx="731520" cy="320040"/>
           </a:xfrm>
           <a:prstGeom prst="rect">
@@ -5361,7 +5339,7 @@
                 </a:solidFill>
                 <a:latin typeface="Calibri"/>
               </a:rPr>
-              <a:t>FEATURE 3 — CONTENT REUSE</a:t>
+              <a:t>REUSE — SINGLE SOURCE OF TRUTH</a:t>
             </a:r>
           </a:p>
         </p:txBody>
@@ -5390,13 +5368,13 @@
           <a:p>
             <a:pPr algn="l"/>
             <a:r>
-              <a:rPr sz="3000" b="1">
+              <a:rPr sz="2800" b="1">
                 <a:solidFill>
                   <a:srgbClr val="003399"/>
                 </a:solidFill>
                 <a:latin typeface="Calibri"/>
               </a:rPr>
-              <a:t>Partials &amp; reusable components</a:t>
+              <a:t>Reusable blocks: "Prerequisites"</a:t>
             </a:r>
           </a:p>
         </p:txBody>
@@ -5409,7 +5387,7 @@
         </p:nvSpPr>
         <p:spPr>
           <a:xfrm>
-            <a:off x="658368" y="1554480"/>
+            <a:off x="658368" y="1481328"/>
             <a:ext cx="2011680" cy="38100"/>
           </a:xfrm>
           <a:prstGeom prst="rect">
@@ -5453,8 +5431,8 @@
         </p:nvSpPr>
         <p:spPr>
           <a:xfrm>
-            <a:off x="658368" y="1920240"/>
-            <a:ext cx="10881360" cy="4297680"/>
+            <a:off x="658368" y="1828800"/>
+            <a:ext cx="10881360" cy="4389120"/>
           </a:xfrm>
           <a:prstGeom prst="rect">
             <a:avLst/>
@@ -5469,14 +5447,14 @@
           <a:p>
             <a:pPr>
               <a:lnSpc>
-                <a:spcPct val="105000"/>
+                <a:spcPct val="104000"/>
               </a:lnSpc>
               <a:spcAft>
-                <a:spcPts val="1000"/>
+                <a:spcPts val="900"/>
               </a:spcAft>
             </a:pPr>
             <a:r>
-              <a:rPr sz="1700" b="1">
+              <a:rPr sz="1600" b="1">
                 <a:solidFill>
                   <a:srgbClr val="FFCC00"/>
                 </a:solidFill>
@@ -5484,33 +5462,33 @@
               <a:t>•  </a:t>
             </a:r>
             <a:r>
-              <a:rPr sz="1700" b="1">
+              <a:rPr sz="1600" b="1">
                 <a:solidFill>
                   <a:srgbClr val="003399"/>
                 </a:solidFill>
               </a:rPr>
-              <a:t>"Prerequisites" partial — </a:t>
-            </a:r>
-            <a:r>
-              <a:rPr sz="1700">
+              <a:t>Markdown partial — </a:t>
+            </a:r>
+            <a:r>
+              <a:rPr sz="1600">
                 <a:solidFill>
                   <a:srgbClr val="1A1A2E"/>
                 </a:solidFill>
               </a:rPr>
-              <a:t>reusable Markdown block factored out (docs/_chapters, _fragments).</a:t>
+              <a:t>factor a recurring block (e.g. "Prerequisites") into one file.</a:t>
             </a:r>
           </a:p>
           <a:p>
             <a:pPr>
               <a:lnSpc>
-                <a:spcPct val="105000"/>
+                <a:spcPct val="104000"/>
               </a:lnSpc>
               <a:spcAft>
-                <a:spcPts val="1000"/>
+                <a:spcPts val="900"/>
               </a:spcAft>
             </a:pPr>
             <a:r>
-              <a:rPr sz="1700" b="1">
+              <a:rPr sz="1600" b="1">
                 <a:solidFill>
                   <a:srgbClr val="FFCC00"/>
                 </a:solidFill>
@@ -5518,7 +5496,7 @@
               <a:t>•  </a:t>
             </a:r>
             <a:r>
-              <a:rPr sz="1700" b="1">
+              <a:rPr sz="1600" b="1">
                 <a:solidFill>
                   <a:srgbClr val="003399"/>
                 </a:solidFill>
@@ -5526,25 +5504,25 @@
               <a:t>Global MDX component — </a:t>
             </a:r>
             <a:r>
-              <a:rPr sz="1700">
+              <a:rPr sz="1600">
                 <a:solidFill>
                   <a:srgbClr val="1A1A2E"/>
                 </a:solidFill>
               </a:rPr>
-              <a:t>Prerequis registered globally → usable in any page without an import.</a:t>
+              <a:t>usable in any page, with no import.</a:t>
             </a:r>
           </a:p>
           <a:p>
             <a:pPr>
               <a:lnSpc>
-                <a:spcPct val="105000"/>
+                <a:spcPct val="104000"/>
               </a:lnSpc>
               <a:spcAft>
-                <a:spcPts val="1000"/>
+                <a:spcPts val="900"/>
               </a:spcAft>
             </a:pPr>
             <a:r>
-              <a:rPr sz="1700" b="1">
+              <a:rPr sz="1600" b="1">
                 <a:solidFill>
                   <a:srgbClr val="FFCC00"/>
                 </a:solidFill>
@@ -5552,33 +5530,33 @@
               <a:t>•  </a:t>
             </a:r>
             <a:r>
-              <a:rPr sz="1700" b="1">
+              <a:rPr sz="1600" b="1">
                 <a:solidFill>
                   <a:srgbClr val="003399"/>
                 </a:solidFill>
               </a:rPr>
-              <a:t>Architecture fragments — </a:t>
-            </a:r>
-            <a:r>
-              <a:rPr sz="1700">
+              <a:t>Nested includes — </a:t>
+            </a:r>
+            <a:r>
+              <a:rPr sz="1600">
                 <a:solidFill>
                   <a:srgbClr val="1A1A2E"/>
                 </a:solidFill>
               </a:rPr>
-              <a:t>_fragments/level-1-context.md, level-2-components.md included in chapters.</a:t>
+              <a:t>a fragment can include others (cycles are detected).</a:t>
             </a:r>
           </a:p>
           <a:p>
             <a:pPr>
               <a:lnSpc>
-                <a:spcPct val="105000"/>
+                <a:spcPct val="104000"/>
               </a:lnSpc>
               <a:spcAft>
-                <a:spcPts val="1000"/>
+                <a:spcPts val="900"/>
               </a:spcAft>
             </a:pPr>
             <a:r>
-              <a:rPr sz="1700" b="1">
+              <a:rPr sz="1600" b="1">
                 <a:solidFill>
                   <a:srgbClr val="FFCC00"/>
                 </a:solidFill>
@@ -5586,7 +5564,7 @@
               <a:t>•  </a:t>
             </a:r>
             <a:r>
-              <a:rPr sz="1700" b="1">
+              <a:rPr sz="1600" b="1">
                 <a:solidFill>
                   <a:srgbClr val="003399"/>
                 </a:solidFill>
@@ -5594,12 +5572,12 @@
               <a:t>Benefit — </a:t>
             </a:r>
             <a:r>
-              <a:rPr sz="1700">
+              <a:rPr sz="1600">
                 <a:solidFill>
                   <a:srgbClr val="1A1A2E"/>
                 </a:solidFill>
               </a:rPr>
-              <a:t>a single source of truth: update the fragment, every page follows.</a:t>
+              <a:t>update the block once → every page follows.</a:t>
             </a:r>
           </a:p>
         </p:txBody>
@@ -5612,7 +5590,7 @@
         </p:nvSpPr>
         <p:spPr>
           <a:xfrm>
-            <a:off x="640080" y="6400800"/>
+            <a:off x="640080" y="6419088"/>
             <a:ext cx="9144000" cy="320040"/>
           </a:xfrm>
           <a:prstGeom prst="rect">
@@ -5634,7 +5612,7 @@
                 </a:solidFill>
                 <a:latin typeface="Calibri"/>
               </a:rPr>
-              <a:t>Docusaurus documentation platform — implemented features</a:t>
+              <a:t>Docusaurus — user guide</a:t>
             </a:r>
           </a:p>
         </p:txBody>
@@ -5647,7 +5625,7 @@
         </p:nvSpPr>
         <p:spPr>
           <a:xfrm>
-            <a:off x="11247120" y="6400800"/>
+            <a:off x="11247120" y="6419088"/>
             <a:ext cx="731520" cy="320040"/>
           </a:xfrm>
           <a:prstGeom prst="rect">
@@ -5766,7 +5744,7 @@
                 </a:solidFill>
                 <a:latin typeface="Calibri"/>
               </a:rPr>
-              <a:t>FEATURE 4 — ARCHITECTURE AS CODE</a:t>
+              <a:t>ILLUSTRATE — ARCHITECTURE DIAGRAMS</a:t>
             </a:r>
           </a:p>
         </p:txBody>
@@ -5795,13 +5773,13 @@
           <a:p>
             <a:pPr algn="l"/>
             <a:r>
-              <a:rPr sz="3000" b="1">
+              <a:rPr sz="2800" b="1">
                 <a:solidFill>
                   <a:srgbClr val="003399"/>
                 </a:solidFill>
                 <a:latin typeface="Calibri"/>
               </a:rPr>
-              <a:t>Architecture diagrams</a:t>
+              <a:t>LikeC4 &amp; tldraw</a:t>
             </a:r>
           </a:p>
         </p:txBody>
@@ -5814,7 +5792,7 @@
         </p:nvSpPr>
         <p:spPr>
           <a:xfrm>
-            <a:off x="658368" y="1554480"/>
+            <a:off x="658368" y="1481328"/>
             <a:ext cx="2011680" cy="38100"/>
           </a:xfrm>
           <a:prstGeom prst="rect">
@@ -5858,8 +5836,8 @@
         </p:nvSpPr>
         <p:spPr>
           <a:xfrm>
-            <a:off x="658368" y="1920240"/>
-            <a:ext cx="10881360" cy="4297680"/>
+            <a:off x="658368" y="1828800"/>
+            <a:ext cx="10881360" cy="4389120"/>
           </a:xfrm>
           <a:prstGeom prst="rect">
             <a:avLst/>
@@ -5874,14 +5852,14 @@
           <a:p>
             <a:pPr>
               <a:lnSpc>
-                <a:spcPct val="105000"/>
+                <a:spcPct val="104000"/>
               </a:lnSpc>
               <a:spcAft>
-                <a:spcPts val="1000"/>
+                <a:spcPts val="900"/>
               </a:spcAft>
             </a:pPr>
             <a:r>
-              <a:rPr sz="1700" b="1">
+              <a:rPr sz="1600" b="1">
                 <a:solidFill>
                   <a:srgbClr val="FFCC00"/>
                 </a:solidFill>
@@ -5889,7 +5867,7 @@
               <a:t>•  </a:t>
             </a:r>
             <a:r>
-              <a:rPr sz="1700" b="1">
+              <a:rPr sz="1600" b="1">
                 <a:solidFill>
                   <a:srgbClr val="003399"/>
                 </a:solidFill>
@@ -5897,77 +5875,77 @@
               <a:t>LikeC4 — </a:t>
             </a:r>
             <a:r>
-              <a:rPr sz="1700">
+              <a:rPr sz="1600">
                 <a:solidFill>
                   <a:srgbClr val="1A1A2E"/>
                 </a:solidFill>
               </a:rPr>
-              <a:t>architecture-as-code model (C4): spec, model, views, deployments (dev / prod), use cases.</a:t>
+              <a:t>architecture diagrams (C4 model) described as text.</a:t>
             </a:r>
           </a:p>
           <a:p>
             <a:pPr>
               <a:lnSpc>
-                <a:spcPct val="105000"/>
+                <a:spcPct val="104000"/>
               </a:lnSpc>
               <a:spcAft>
-                <a:spcPts val="1000"/>
+                <a:spcPts val="900"/>
               </a:spcAft>
             </a:pPr>
             <a:r>
-              <a:rPr sz="1500" b="1">
+              <a:rPr sz="1400" b="1">
                 <a:solidFill>
                   <a:srgbClr val="1B4FA0"/>
                 </a:solidFill>
               </a:rPr>
-              <a:t>    –  </a:t>
-            </a:r>
-            <a:r>
-              <a:rPr sz="1500">
+              <a:t>   –  </a:t>
+            </a:r>
+            <a:r>
+              <a:rPr sz="1400">
                 <a:solidFill>
                   <a:srgbClr val="4A4A4A"/>
                 </a:solidFill>
               </a:rPr>
-              <a:t>generates static diagrams (build-likec4) and interactive React components (codegen).</a:t>
+              <a:t>/likec4 page to explore the interactive diagram.</a:t>
             </a:r>
           </a:p>
           <a:p>
             <a:pPr>
               <a:lnSpc>
-                <a:spcPct val="105000"/>
+                <a:spcPct val="104000"/>
               </a:lnSpc>
               <a:spcAft>
-                <a:spcPts val="1000"/>
+                <a:spcPts val="900"/>
               </a:spcAft>
             </a:pPr>
             <a:r>
-              <a:rPr sz="1500" b="1">
+              <a:rPr sz="1400" b="1">
                 <a:solidFill>
                   <a:srgbClr val="1B4FA0"/>
                 </a:solidFill>
               </a:rPr>
-              <a:t>    –  </a:t>
-            </a:r>
-            <a:r>
-              <a:rPr sz="1500">
+              <a:t>   –  </a:t>
+            </a:r>
+            <a:r>
+              <a:rPr sz="1400">
                 <a:solidFill>
                   <a:srgbClr val="4A4A4A"/>
                 </a:solidFill>
               </a:rPr>
-              <a:t>dedicated /likec4 page to explore the interactive diagram.</a:t>
+              <a:t>views: context, components, dev / prod deployments, use cases.</a:t>
             </a:r>
           </a:p>
           <a:p>
             <a:pPr>
               <a:lnSpc>
-                <a:spcPct val="105000"/>
+                <a:spcPct val="104000"/>
               </a:lnSpc>
               <a:spcAft>
-                <a:spcPts val="1000"/>
+                <a:spcPts val="900"/>
               </a:spcAft>
             </a:pPr>
             <a:r>
-              <a:rPr sz="1700" b="1">
+              <a:rPr sz="1600" b="1">
                 <a:solidFill>
                   <a:srgbClr val="FFCC00"/>
                 </a:solidFill>
@@ -5975,7 +5953,7 @@
               <a:t>•  </a:t>
             </a:r>
             <a:r>
-              <a:rPr sz="1700" b="1">
+              <a:rPr sz="1600" b="1">
                 <a:solidFill>
                   <a:srgbClr val="003399"/>
                 </a:solidFill>
@@ -5983,25 +5961,25 @@
               <a:t>tldraw — </a:t>
             </a:r>
             <a:r>
-              <a:rPr sz="1700">
+              <a:rPr sz="1600">
                 <a:solidFill>
                   <a:srgbClr val="1A1A2E"/>
                 </a:solidFill>
               </a:rPr>
-              <a:t>/tldraw page for free-form sketches and whiteboarding embedded in the site.</a:t>
+              <a:t>/tldraw page for free-form sketches and whiteboarding.</a:t>
             </a:r>
           </a:p>
           <a:p>
             <a:pPr>
               <a:lnSpc>
-                <a:spcPct val="105000"/>
+                <a:spcPct val="104000"/>
               </a:lnSpc>
               <a:spcAft>
-                <a:spcPts val="1000"/>
+                <a:spcPts val="900"/>
               </a:spcAft>
             </a:pPr>
             <a:r>
-              <a:rPr sz="1700" b="1">
+              <a:rPr sz="1600" b="1">
                 <a:solidFill>
                   <a:srgbClr val="FFCC00"/>
                 </a:solidFill>
@@ -6009,7 +5987,7 @@
               <a:t>•  </a:t>
             </a:r>
             <a:r>
-              <a:rPr sz="1700" b="1">
+              <a:rPr sz="1600" b="1">
                 <a:solidFill>
                   <a:srgbClr val="003399"/>
                 </a:solidFill>
@@ -6017,12 +5995,12 @@
               <a:t>Architecture docs — </a:t>
             </a:r>
             <a:r>
-              <a:rPr sz="1700">
+              <a:rPr sz="1600">
                 <a:solidFill>
                   <a:srgbClr val="1A1A2E"/>
                 </a:solidFill>
               </a:rPr>
-              <a:t>structured chapters: executive summary, stakeholders, ADRs, building blocks, non-functional…</a:t>
+              <a:t>ready chapters: summary, stakeholders, ADRs, building blocks…</a:t>
             </a:r>
           </a:p>
         </p:txBody>
@@ -6035,7 +6013,7 @@
         </p:nvSpPr>
         <p:spPr>
           <a:xfrm>
-            <a:off x="640080" y="6400800"/>
+            <a:off x="640080" y="6419088"/>
             <a:ext cx="9144000" cy="320040"/>
           </a:xfrm>
           <a:prstGeom prst="rect">
@@ -6057,7 +6035,7 @@
                 </a:solidFill>
                 <a:latin typeface="Calibri"/>
               </a:rPr>
-              <a:t>Docusaurus documentation platform — implemented features</a:t>
+              <a:t>Docusaurus — user guide</a:t>
             </a:r>
           </a:p>
         </p:txBody>
@@ -6070,7 +6048,7 @@
         </p:nvSpPr>
         <p:spPr>
           <a:xfrm>
-            <a:off x="11247120" y="6400800"/>
+            <a:off x="11247120" y="6419088"/>
             <a:ext cx="731520" cy="320040"/>
           </a:xfrm>
           <a:prstGeom prst="rect">
@@ -6189,7 +6167,7 @@
                 </a:solidFill>
                 <a:latin typeface="Calibri"/>
               </a:rPr>
-              <a:t>FEATURE 5 — WEASYPRINT</a:t>
+              <a:t>EXPORT — PROFESSIONAL PDF</a:t>
             </a:r>
           </a:p>
         </p:txBody>
@@ -6218,13 +6196,13 @@
           <a:p>
             <a:pPr algn="l"/>
             <a:r>
-              <a:rPr sz="3000" b="1">
+              <a:rPr sz="2800" b="1">
                 <a:solidFill>
                   <a:srgbClr val="003399"/>
                 </a:solidFill>
                 <a:latin typeface="Calibri"/>
               </a:rPr>
-              <a:t>Professional PDF export</a:t>
+              <a:t>Export the docs to PDF</a:t>
             </a:r>
           </a:p>
         </p:txBody>
@@ -6237,7 +6215,7 @@
         </p:nvSpPr>
         <p:spPr>
           <a:xfrm>
-            <a:off x="658368" y="1554480"/>
+            <a:off x="658368" y="1481328"/>
             <a:ext cx="2011680" cy="38100"/>
           </a:xfrm>
           <a:prstGeom prst="rect">
@@ -6281,8 +6259,8 @@
         </p:nvSpPr>
         <p:spPr>
           <a:xfrm>
-            <a:off x="658368" y="1920240"/>
-            <a:ext cx="10881360" cy="4297680"/>
+            <a:off x="658368" y="1828800"/>
+            <a:ext cx="5029200" cy="4389120"/>
           </a:xfrm>
           <a:prstGeom prst="rect">
             <a:avLst/>
@@ -6297,14 +6275,14 @@
           <a:p>
             <a:pPr>
               <a:lnSpc>
-                <a:spcPct val="105000"/>
+                <a:spcPct val="104000"/>
               </a:lnSpc>
               <a:spcAft>
-                <a:spcPts val="1000"/>
+                <a:spcPts val="900"/>
               </a:spcAft>
             </a:pPr>
             <a:r>
-              <a:rPr sz="1700" b="1">
+              <a:rPr sz="1600" b="1">
                 <a:solidFill>
                   <a:srgbClr val="FFCC00"/>
                 </a:solidFill>
@@ -6312,33 +6290,33 @@
               <a:t>•  </a:t>
             </a:r>
             <a:r>
-              <a:rPr sz="1700" b="1">
+              <a:rPr sz="1600" b="1">
                 <a:solidFill>
                   <a:srgbClr val="003399"/>
                 </a:solidFill>
               </a:rPr>
-              <a:t>Single document — </a:t>
-            </a:r>
-            <a:r>
-              <a:rPr sz="1700">
+              <a:t>make pdf — </a:t>
+            </a:r>
+            <a:r>
+              <a:rPr sz="1600">
                 <a:solidFill>
                   <a:srgbClr val="1A1A2E"/>
                 </a:solidFill>
               </a:rPr>
-              <a:t>the entire docs/ folder assembled into one PDF (make pdf).</a:t>
+              <a:t>assembles the whole docs into one branded PDF.</a:t>
             </a:r>
           </a:p>
           <a:p>
             <a:pPr>
               <a:lnSpc>
-                <a:spcPct val="105000"/>
+                <a:spcPct val="104000"/>
               </a:lnSpc>
               <a:spcAft>
-                <a:spcPts val="1000"/>
+                <a:spcPts val="900"/>
               </a:spcAft>
             </a:pPr>
             <a:r>
-              <a:rPr sz="1700" b="1">
+              <a:rPr sz="1600" b="1">
                 <a:solidFill>
                   <a:srgbClr val="FFCC00"/>
                 </a:solidFill>
@@ -6346,33 +6324,25 @@
               <a:t>•  </a:t>
             </a:r>
             <a:r>
-              <a:rPr sz="1700" b="1">
-                <a:solidFill>
-                  <a:srgbClr val="003399"/>
-                </a:solidFill>
-              </a:rPr>
-              <a:t>Professional layout — </a:t>
-            </a:r>
-            <a:r>
-              <a:rPr sz="1700">
+              <a:rPr sz="1600">
                 <a:solidFill>
                   <a:srgbClr val="1A1A2E"/>
                 </a:solidFill>
               </a:rPr>
-              <a:t>branded cover page, automatic table of contents with real page numbers, running headers and PDF bookmarks.</a:t>
+              <a:t>cover page, table of contents (real page numbers), bookmarks.</a:t>
             </a:r>
           </a:p>
           <a:p>
             <a:pPr>
               <a:lnSpc>
-                <a:spcPct val="105000"/>
+                <a:spcPct val="104000"/>
               </a:lnSpc>
               <a:spcAft>
-                <a:spcPts val="1000"/>
+                <a:spcPts val="900"/>
               </a:spcAft>
             </a:pPr>
             <a:r>
-              <a:rPr sz="1700" b="1">
+              <a:rPr sz="1600" b="1">
                 <a:solidFill>
                   <a:srgbClr val="FFCC00"/>
                 </a:solidFill>
@@ -6380,101 +6350,83 @@
               <a:t>•  </a:t>
             </a:r>
             <a:r>
-              <a:rPr sz="1700" b="1">
+              <a:rPr sz="1600" b="1">
                 <a:solidFill>
                   <a:srgbClr val="003399"/>
                 </a:solidFill>
               </a:rPr>
-              <a:t>Containerized — </a:t>
-            </a:r>
-            <a:r>
-              <a:rPr sz="1700">
+              <a:t>Customizable — </a:t>
+            </a:r>
+            <a:r>
+              <a:rPr sz="1600">
                 <a:solidFill>
                   <a:srgbClr val="1A1A2E"/>
                 </a:solidFill>
               </a:rPr>
-              <a:t>dedicated Docker image (docker/weasyprint), compose pdf profile, styled via report.css.</a:t>
+              <a:t>title, subtitle, baseUrl, pages to exclude.</a:t>
             </a:r>
           </a:p>
           <a:p>
             <a:pPr>
               <a:lnSpc>
-                <a:spcPct val="105000"/>
+                <a:spcPct val="104000"/>
               </a:lnSpc>
               <a:spcAft>
-                <a:spcPts val="1000"/>
+                <a:spcPts val="900"/>
               </a:spcAft>
             </a:pPr>
             <a:r>
-              <a:rPr sz="1700" b="1">
-                <a:solidFill>
-                  <a:srgbClr val="FFCC00"/>
-                </a:solidFill>
-              </a:rPr>
-              <a:t>•  </a:t>
-            </a:r>
-            <a:r>
-              <a:rPr sz="1700" b="1">
-                <a:solidFill>
-                  <a:srgbClr val="003399"/>
-                </a:solidFill>
-              </a:rPr>
-              <a:t>CLI options — </a:t>
-            </a:r>
-            <a:r>
-              <a:rPr sz="1700">
-                <a:solidFill>
-                  <a:srgbClr val="1A1A2E"/>
-                </a:solidFill>
-              </a:rPr>
-              <a:t>--base-url, --title / --subtitle / --eyebrow, --exclude (e.g. the interactive LikeC4 page that can't be rendered to PDF).</a:t>
-            </a:r>
-          </a:p>
-          <a:p>
-            <a:pPr>
-              <a:lnSpc>
-                <a:spcPct val="105000"/>
-              </a:lnSpc>
-              <a:spcAft>
-                <a:spcPts val="1000"/>
-              </a:spcAft>
-            </a:pPr>
-            <a:r>
-              <a:rPr sz="1700" b="1">
-                <a:solidFill>
-                  <a:srgbClr val="FFCC00"/>
-                </a:solidFill>
-              </a:rPr>
-              <a:t>•  </a:t>
-            </a:r>
-            <a:r>
-              <a:rPr sz="1700" b="1">
-                <a:solidFill>
-                  <a:srgbClr val="003399"/>
-                </a:solidFill>
-              </a:rPr>
-              <a:t>Fonts — </a:t>
-            </a:r>
-            <a:r>
-              <a:rPr sz="1700">
-                <a:solidFill>
-                  <a:srgbClr val="1A1A2E"/>
-                </a:solidFill>
-              </a:rPr>
-              <a:t>IBM Plex (Sans / Mono) vendored in the repo for reproducible rendering.</a:t>
-            </a:r>
-          </a:p>
-        </p:txBody>
-      </p:sp>
-      <p:sp>
-        <p:nvSpPr>
-          <p:cNvPr id="7" name="TextBox 6"/>
+              <a:rPr sz="1400" b="1">
+                <a:solidFill>
+                  <a:srgbClr val="1B4FA0"/>
+                </a:solidFill>
+              </a:rPr>
+              <a:t>   –  </a:t>
+            </a:r>
+            <a:r>
+              <a:rPr sz="1400">
+                <a:solidFill>
+                  <a:srgbClr val="4A4A4A"/>
+                </a:solidFill>
+              </a:rPr>
+              <a:t>e.g. exclude the interactive LikeC4 page (not printable).</a:t>
+            </a:r>
+          </a:p>
+        </p:txBody>
+      </p:sp>
+      <p:pic>
+        <p:nvPicPr>
+          <p:cNvPr id="7" name="Picture 6" descr="03-pdf-usage.png"/>
+          <p:cNvPicPr>
+            <a:picLocks noChangeAspect="1"/>
+          </p:cNvPicPr>
+          <p:nvPr/>
+        </p:nvPicPr>
+        <p:blipFill>
+          <a:blip r:embed="rId2"/>
+          <a:stretch>
+            <a:fillRect/>
+          </a:stretch>
+        </p:blipFill>
+        <p:spPr>
+          <a:xfrm>
+            <a:off x="5806440" y="2320790"/>
+            <a:ext cx="6035040" cy="3130819"/>
+          </a:xfrm>
+          <a:prstGeom prst="rect">
+            <a:avLst/>
+          </a:prstGeom>
+        </p:spPr>
+      </p:pic>
+      <p:sp>
+        <p:nvSpPr>
+          <p:cNvPr id="8" name="TextBox 7"/>
           <p:cNvSpPr txBox="1"/>
           <p:nvPr/>
         </p:nvSpPr>
         <p:spPr>
           <a:xfrm>
-            <a:off x="640080" y="6400800"/>
+            <a:off x="640080" y="6419088"/>
             <a:ext cx="9144000" cy="320040"/>
           </a:xfrm>
           <a:prstGeom prst="rect">
@@ -6496,20 +6448,20 @@
                 </a:solidFill>
                 <a:latin typeface="Calibri"/>
               </a:rPr>
-              <a:t>Docusaurus documentation platform — implemented features</a:t>
-            </a:r>
-          </a:p>
-        </p:txBody>
-      </p:sp>
-      <p:sp>
-        <p:nvSpPr>
-          <p:cNvPr id="8" name="TextBox 7"/>
+              <a:t>Docusaurus — user guide</a:t>
+            </a:r>
+          </a:p>
+        </p:txBody>
+      </p:sp>
+      <p:sp>
+        <p:nvSpPr>
+          <p:cNvPr id="9" name="TextBox 8"/>
           <p:cNvSpPr txBox="1"/>
           <p:nvPr/>
         </p:nvSpPr>
         <p:spPr>
           <a:xfrm>
-            <a:off x="11247120" y="6400800"/>
+            <a:off x="11247120" y="6419088"/>
             <a:ext cx="731520" cy="320040"/>
           </a:xfrm>
           <a:prstGeom prst="rect">
@@ -6628,7 +6580,7 @@
                 </a:solidFill>
                 <a:latin typeface="Calibri"/>
               </a:rPr>
-              <a:t>FEATURE 5 (CONT.) — SECURITY / SUPPLY CHAIN</a:t>
+              <a:t>AUTOMATE — CI/CD</a:t>
             </a:r>
           </a:p>
         </p:txBody>
@@ -6657,13 +6609,13 @@
           <a:p>
             <a:pPr algn="l"/>
             <a:r>
-              <a:rPr sz="3000" b="1">
+              <a:rPr sz="2800" b="1">
                 <a:solidFill>
                   <a:srgbClr val="003399"/>
                 </a:solidFill>
                 <a:latin typeface="Calibri"/>
               </a:rPr>
-              <a:t>Hardened image &amp; multi-stage build</a:t>
+              <a:t>What happens on every push</a:t>
             </a:r>
           </a:p>
         </p:txBody>
@@ -6676,7 +6628,7 @@
         </p:nvSpPr>
         <p:spPr>
           <a:xfrm>
-            <a:off x="658368" y="1554480"/>
+            <a:off x="658368" y="1481328"/>
             <a:ext cx="2011680" cy="38100"/>
           </a:xfrm>
           <a:prstGeom prst="rect">
@@ -6720,8 +6672,8 @@
         </p:nvSpPr>
         <p:spPr>
           <a:xfrm>
-            <a:off x="658368" y="1920240"/>
-            <a:ext cx="10881360" cy="4297680"/>
+            <a:off x="658368" y="1828800"/>
+            <a:ext cx="10881360" cy="4389120"/>
           </a:xfrm>
           <a:prstGeom prst="rect">
             <a:avLst/>
@@ -6736,14 +6688,14 @@
           <a:p>
             <a:pPr>
               <a:lnSpc>
-                <a:spcPct val="105000"/>
+                <a:spcPct val="104000"/>
               </a:lnSpc>
               <a:spcAft>
-                <a:spcPts val="1000"/>
+                <a:spcPts val="900"/>
               </a:spcAft>
             </a:pPr>
             <a:r>
-              <a:rPr sz="1700" b="1">
+              <a:rPr sz="1600" b="1">
                 <a:solidFill>
                   <a:srgbClr val="FFCC00"/>
                 </a:solidFill>
@@ -6751,33 +6703,33 @@
               <a:t>•  </a:t>
             </a:r>
             <a:r>
-              <a:rPr sz="1700" b="1">
+              <a:rPr sz="1600" b="1">
                 <a:solidFill>
                   <a:srgbClr val="003399"/>
                 </a:solidFill>
               </a:rPr>
-              <a:t>Hardened base — </a:t>
-            </a:r>
-            <a:r>
-              <a:rPr sz="1700">
+              <a:t>Site published — </a:t>
+            </a:r>
+            <a:r>
+              <a:rPr sz="1600">
                 <a:solidFill>
                   <a:srgbClr val="1A1A2E"/>
                 </a:solidFill>
               </a:rPr>
-              <a:t>image built on Red Hat hardened images (hi/python).</a:t>
+              <a:t>the site + documentation.pdf are deployed to GitHub Pages.</a:t>
             </a:r>
           </a:p>
           <a:p>
             <a:pPr>
               <a:lnSpc>
-                <a:spcPct val="105000"/>
+                <a:spcPct val="104000"/>
               </a:lnSpc>
               <a:spcAft>
-                <a:spcPts val="1000"/>
+                <a:spcPts val="900"/>
               </a:spcAft>
             </a:pPr>
             <a:r>
-              <a:rPr sz="1700" b="1">
+              <a:rPr sz="1600" b="1">
                 <a:solidFill>
                   <a:srgbClr val="FFCC00"/>
                 </a:solidFill>
@@ -6785,59 +6737,67 @@
               <a:t>•  </a:t>
             </a:r>
             <a:r>
-              <a:rPr sz="1700" b="1">
+              <a:rPr sz="1600" b="1">
                 <a:solidFill>
                   <a:srgbClr val="003399"/>
                 </a:solidFill>
               </a:rPr>
-              <a:t>Multi-stage — </a:t>
-            </a:r>
-            <a:r>
-              <a:rPr sz="1700">
+              <a:t>PDF artifact — </a:t>
+            </a:r>
+            <a:r>
+              <a:rPr sz="1600">
                 <a:solidFill>
                   <a:srgbClr val="1A1A2E"/>
                 </a:solidFill>
               </a:rPr>
-              <a:t>builder stage (3.12-builder) compiles the venv and stages native libs + fonts; copied into a minimal runtime (3.12).</a:t>
+              <a:t>on every push / pull request the PDF is built and downloadable.</a:t>
             </a:r>
           </a:p>
           <a:p>
             <a:pPr>
               <a:lnSpc>
-                <a:spcPct val="105000"/>
+                <a:spcPct val="104000"/>
               </a:lnSpc>
               <a:spcAft>
-                <a:spcPts val="1000"/>
+                <a:spcPts val="900"/>
               </a:spcAft>
             </a:pPr>
             <a:r>
-              <a:rPr sz="1500" b="1">
-                <a:solidFill>
-                  <a:srgbClr val="1B4FA0"/>
-                </a:solidFill>
-              </a:rPr>
-              <a:t>    –  </a:t>
-            </a:r>
-            <a:r>
-              <a:rPr sz="1500">
-                <a:solidFill>
-                  <a:srgbClr val="4A4A4A"/>
-                </a:solidFill>
-              </a:rPr>
-              <a:t>runtime glibc / linker kept, unneeded UBI libs stripped → lightweight image.</a:t>
+              <a:rPr sz="1600" b="1">
+                <a:solidFill>
+                  <a:srgbClr val="FFCC00"/>
+                </a:solidFill>
+              </a:rPr>
+              <a:t>•  </a:t>
+            </a:r>
+            <a:r>
+              <a:rPr sz="1600" b="1">
+                <a:solidFill>
+                  <a:srgbClr val="003399"/>
+                </a:solidFill>
+              </a:rPr>
+              <a:t>Release PDF — </a:t>
+            </a:r>
+            <a:r>
+              <a:rPr sz="1600">
+                <a:solidFill>
+                  <a:srgbClr val="1A1A2E"/>
+                </a:solidFill>
+              </a:rPr>
+              <a:t>on each release, the architecture PDF is proposed as a Pull Request.</a:t>
             </a:r>
           </a:p>
           <a:p>
             <a:pPr>
               <a:lnSpc>
-                <a:spcPct val="105000"/>
+                <a:spcPct val="104000"/>
               </a:lnSpc>
               <a:spcAft>
-                <a:spcPts val="1000"/>
+                <a:spcPts val="900"/>
               </a:spcAft>
             </a:pPr>
             <a:r>
-              <a:rPr sz="1700" b="1">
+              <a:rPr sz="1600" b="1">
                 <a:solidFill>
                   <a:srgbClr val="FFCC00"/>
                 </a:solidFill>
@@ -6845,20 +6805,20 @@
               <a:t>•  </a:t>
             </a:r>
             <a:r>
-              <a:rPr sz="1700" b="1">
+              <a:rPr sz="1600" b="1">
                 <a:solidFill>
                   <a:srgbClr val="003399"/>
                 </a:solidFill>
               </a:rPr>
-              <a:t>Up-to-date dependencies — </a:t>
-            </a:r>
-            <a:r>
-              <a:rPr sz="1700">
+              <a:t>Nothing manual — </a:t>
+            </a:r>
+            <a:r>
+              <a:rPr sz="1600">
                 <a:solidFill>
                   <a:srgbClr val="1A1A2E"/>
                 </a:solidFill>
               </a:rPr>
-              <a:t>Docusaurus 3.10.1 + likec4 1.58 to fix security advisories.</a:t>
+              <a:t>you push, the pipeline does the rest.</a:t>
             </a:r>
           </a:p>
         </p:txBody>
@@ -6871,7 +6831,7 @@
         </p:nvSpPr>
         <p:spPr>
           <a:xfrm>
-            <a:off x="640080" y="6400800"/>
+            <a:off x="640080" y="6419088"/>
             <a:ext cx="9144000" cy="320040"/>
           </a:xfrm>
           <a:prstGeom prst="rect">
@@ -6893,7 +6853,7 @@
                 </a:solidFill>
                 <a:latin typeface="Calibri"/>
               </a:rPr>
-              <a:t>Docusaurus documentation platform — implemented features</a:t>
+              <a:t>Docusaurus — user guide</a:t>
             </a:r>
           </a:p>
         </p:txBody>
@@ -6906,7 +6866,7 @@
         </p:nvSpPr>
         <p:spPr>
           <a:xfrm>
-            <a:off x="11247120" y="6400800"/>
+            <a:off x="11247120" y="6419088"/>
             <a:ext cx="731520" cy="320040"/>
           </a:xfrm>
           <a:prstGeom prst="rect">
@@ -7025,7 +6985,7 @@
                 </a:solidFill>
                 <a:latin typeface="Calibri"/>
               </a:rPr>
-              <a:t>FEATURE 6 — BUILD &amp; DEPLOYMENT</a:t>
+              <a:t>CHEAT SHEET — COMMANDS</a:t>
             </a:r>
           </a:p>
         </p:txBody>
@@ -7054,13 +7014,13 @@
           <a:p>
             <a:pPr algn="l"/>
             <a:r>
-              <a:rPr sz="3000" b="1">
+              <a:rPr sz="2800" b="1">
                 <a:solidFill>
                   <a:srgbClr val="003399"/>
                 </a:solidFill>
                 <a:latin typeface="Calibri"/>
               </a:rPr>
-              <a:t>Industrialization: CI/CD &amp; Docker</a:t>
+              <a:t>The essential commands</a:t>
             </a:r>
           </a:p>
         </p:txBody>
@@ -7073,7 +7033,7 @@
         </p:nvSpPr>
         <p:spPr>
           <a:xfrm>
-            <a:off x="658368" y="1554480"/>
+            <a:off x="658368" y="1481328"/>
             <a:ext cx="2011680" cy="38100"/>
           </a:xfrm>
           <a:prstGeom prst="rect">
@@ -7117,8 +7077,8 @@
         </p:nvSpPr>
         <p:spPr>
           <a:xfrm>
-            <a:off x="658368" y="1920240"/>
-            <a:ext cx="10881360" cy="4297680"/>
+            <a:off x="658368" y="1828800"/>
+            <a:ext cx="5029200" cy="4389120"/>
           </a:xfrm>
           <a:prstGeom prst="rect">
             <a:avLst/>
@@ -7133,14 +7093,14 @@
           <a:p>
             <a:pPr>
               <a:lnSpc>
-                <a:spcPct val="105000"/>
+                <a:spcPct val="104000"/>
               </a:lnSpc>
               <a:spcAft>
-                <a:spcPts val="1000"/>
+                <a:spcPts val="900"/>
               </a:spcAft>
             </a:pPr>
             <a:r>
-              <a:rPr sz="1700" b="1">
+              <a:rPr sz="1600" b="1">
                 <a:solidFill>
                   <a:srgbClr val="FFCC00"/>
                 </a:solidFill>
@@ -7148,59 +7108,67 @@
               <a:t>•  </a:t>
             </a:r>
             <a:r>
-              <a:rPr sz="1700" b="1">
+              <a:rPr sz="1600" b="1">
                 <a:solidFill>
                   <a:srgbClr val="003399"/>
                 </a:solidFill>
               </a:rPr>
-              <a:t>deploy.yml — </a:t>
-            </a:r>
-            <a:r>
-              <a:rPr sz="1700">
+              <a:t>make dev — </a:t>
+            </a:r>
+            <a:r>
+              <a:rPr sz="1600">
                 <a:solidFill>
                   <a:srgbClr val="1A1A2E"/>
                 </a:solidFill>
               </a:rPr>
-              <a:t>publishes the site + documentation.pdf to GitHub Pages (downloadable from the deployed URL).</a:t>
+              <a:t>local server + live preview.</a:t>
             </a:r>
           </a:p>
           <a:p>
             <a:pPr>
               <a:lnSpc>
-                <a:spcPct val="105000"/>
+                <a:spcPct val="104000"/>
               </a:lnSpc>
               <a:spcAft>
-                <a:spcPts val="1000"/>
+                <a:spcPts val="900"/>
               </a:spcAft>
             </a:pPr>
             <a:r>
-              <a:rPr sz="1500" b="1">
-                <a:solidFill>
-                  <a:srgbClr val="1B4FA0"/>
-                </a:solidFill>
-              </a:rPr>
-              <a:t>    –  </a:t>
-            </a:r>
-            <a:r>
-              <a:rPr sz="1500">
-                <a:solidFill>
-                  <a:srgbClr val="4A4A4A"/>
-                </a:solidFill>
-              </a:rPr>
-              <a:t>on every push and pull request: documentation-pdf artifact produced (build-pdf job).</a:t>
+              <a:rPr sz="1600" b="1">
+                <a:solidFill>
+                  <a:srgbClr val="FFCC00"/>
+                </a:solidFill>
+              </a:rPr>
+              <a:t>•  </a:t>
+            </a:r>
+            <a:r>
+              <a:rPr sz="1600" b="1">
+                <a:solidFill>
+                  <a:srgbClr val="003399"/>
+                </a:solidFill>
+              </a:rPr>
+              <a:t>make prod — </a:t>
+            </a:r>
+            <a:r>
+              <a:rPr sz="1600">
+                <a:solidFill>
+                  <a:srgbClr val="1A1A2E"/>
+                </a:solidFill>
+              </a:rPr>
+              <a:t>production build (Caddy).</a:t>
             </a:r>
           </a:p>
           <a:p>
             <a:pPr>
               <a:lnSpc>
-                <a:spcPct val="105000"/>
+                <a:spcPct val="104000"/>
               </a:lnSpc>
               <a:spcAft>
-                <a:spcPts val="1000"/>
+                <a:spcPts val="900"/>
               </a:spcAft>
             </a:pPr>
             <a:r>
-              <a:rPr sz="1700" b="1">
+              <a:rPr sz="1600" b="1">
                 <a:solidFill>
                   <a:srgbClr val="FFCC00"/>
                 </a:solidFill>
@@ -7208,33 +7176,33 @@
               <a:t>•  </a:t>
             </a:r>
             <a:r>
-              <a:rPr sz="1700" b="1">
+              <a:rPr sz="1600" b="1">
                 <a:solidFill>
                   <a:srgbClr val="003399"/>
                 </a:solidFill>
               </a:rPr>
-              <a:t>architecture-pdf-release.yml — </a:t>
-            </a:r>
-            <a:r>
-              <a:rPr sz="1700">
+              <a:t>make pdf — </a:t>
+            </a:r>
+            <a:r>
+              <a:rPr sz="1600">
                 <a:solidFill>
                   <a:srgbClr val="1A1A2E"/>
                 </a:solidFill>
               </a:rPr>
-              <a:t>proposes the architecture PDF as a Pull Request on each release (opened with a PAT).</a:t>
+              <a:t>export the docs to PDF.</a:t>
             </a:r>
           </a:p>
           <a:p>
             <a:pPr>
               <a:lnSpc>
-                <a:spcPct val="105000"/>
+                <a:spcPct val="104000"/>
               </a:lnSpc>
               <a:spcAft>
-                <a:spcPts val="1000"/>
+                <a:spcPts val="900"/>
               </a:spcAft>
             </a:pPr>
             <a:r>
-              <a:rPr sz="1700" b="1">
+              <a:rPr sz="1600" b="1">
                 <a:solidFill>
                   <a:srgbClr val="FFCC00"/>
                 </a:solidFill>
@@ -7242,67 +7210,57 @@
               <a:t>•  </a:t>
             </a:r>
             <a:r>
-              <a:rPr sz="1700" b="1">
+              <a:rPr sz="1600" b="1">
                 <a:solidFill>
                   <a:srgbClr val="003399"/>
                 </a:solidFill>
               </a:rPr>
-              <a:t>Docker / compose — </a:t>
-            </a:r>
-            <a:r>
-              <a:rPr sz="1700">
+              <a:t>One entry point — </a:t>
+            </a:r>
+            <a:r>
+              <a:rPr sz="1600">
                 <a:solidFill>
                   <a:srgbClr val="1A1A2E"/>
                 </a:solidFill>
               </a:rPr>
-              <a:t>compose.yaml (dev + pdf profile), compose-prod.yaml, Caddy reverse proxy.</a:t>
-            </a:r>
-          </a:p>
-          <a:p>
-            <a:pPr>
-              <a:lnSpc>
-                <a:spcPct val="105000"/>
-              </a:lnSpc>
-              <a:spcAft>
-                <a:spcPts val="1000"/>
-              </a:spcAft>
-            </a:pPr>
-            <a:r>
-              <a:rPr sz="1700" b="1">
-                <a:solidFill>
-                  <a:srgbClr val="FFCC00"/>
-                </a:solidFill>
-              </a:rPr>
-              <a:t>•  </a:t>
-            </a:r>
-            <a:r>
-              <a:rPr sz="1700" b="1">
-                <a:solidFill>
-                  <a:srgbClr val="003399"/>
-                </a:solidFill>
-              </a:rPr>
-              <a:t>Makefile — </a:t>
-            </a:r>
-            <a:r>
-              <a:rPr sz="1700">
-                <a:solidFill>
-                  <a:srgbClr val="1A1A2E"/>
-                </a:solidFill>
-              </a:rPr>
-              <a:t>make dev, make prod, make pdf — a single entry point for the whole chain.</a:t>
-            </a:r>
-          </a:p>
-        </p:txBody>
-      </p:sp>
-      <p:sp>
-        <p:nvSpPr>
-          <p:cNvPr id="7" name="TextBox 6"/>
+              <a:t>the Makefile orchestrates the whole chain.</a:t>
+            </a:r>
+          </a:p>
+        </p:txBody>
+      </p:sp>
+      <p:pic>
+        <p:nvPicPr>
+          <p:cNvPr id="7" name="Picture 6" descr="02-make-commands.png"/>
+          <p:cNvPicPr>
+            <a:picLocks noChangeAspect="1"/>
+          </p:cNvPicPr>
+          <p:nvPr/>
+        </p:nvPicPr>
+        <p:blipFill>
+          <a:blip r:embed="rId2"/>
+          <a:stretch>
+            <a:fillRect/>
+          </a:stretch>
+        </p:blipFill>
+        <p:spPr>
+          <a:xfrm>
+            <a:off x="5806440" y="2239593"/>
+            <a:ext cx="6035040" cy="3293213"/>
+          </a:xfrm>
+          <a:prstGeom prst="rect">
+            <a:avLst/>
+          </a:prstGeom>
+        </p:spPr>
+      </p:pic>
+      <p:sp>
+        <p:nvSpPr>
+          <p:cNvPr id="8" name="TextBox 7"/>
           <p:cNvSpPr txBox="1"/>
           <p:nvPr/>
         </p:nvSpPr>
         <p:spPr>
           <a:xfrm>
-            <a:off x="640080" y="6400800"/>
+            <a:off x="640080" y="6419088"/>
             <a:ext cx="9144000" cy="320040"/>
           </a:xfrm>
           <a:prstGeom prst="rect">
@@ -7324,20 +7282,20 @@
                 </a:solidFill>
                 <a:latin typeface="Calibri"/>
               </a:rPr>
-              <a:t>Docusaurus documentation platform — implemented features</a:t>
-            </a:r>
-          </a:p>
-        </p:txBody>
-      </p:sp>
-      <p:sp>
-        <p:nvSpPr>
-          <p:cNvPr id="8" name="TextBox 7"/>
+              <a:t>Docusaurus — user guide</a:t>
+            </a:r>
+          </a:p>
+        </p:txBody>
+      </p:sp>
+      <p:sp>
+        <p:nvSpPr>
+          <p:cNvPr id="9" name="TextBox 8"/>
           <p:cNvSpPr txBox="1"/>
           <p:nvPr/>
         </p:nvSpPr>
         <p:spPr>
           <a:xfrm>
-            <a:off x="11247120" y="6400800"/>
+            <a:off x="11247120" y="6419088"/>
             <a:ext cx="731520" cy="320040"/>
           </a:xfrm>
           <a:prstGeom prst="rect">
